--- a/slide/themes/src/25_nexus.pptx
+++ b/slide/themes/src/25_nexus.pptx
@@ -12560,9 +12560,6 @@
                 <a:solidFill>
                   <a:schemeClr val="bg1"/>
                 </a:solidFill>
-                <a:latin typeface="Arial Black"/>
-                <a:ea typeface="Arial Black"/>
-                <a:cs typeface="Arial Black"/>
               </a:defRPr>
             </a:lvl1pPr>
             <a:lvl2pPr>
@@ -12570,9 +12567,6 @@
                 <a:solidFill>
                   <a:schemeClr val="bg1"/>
                 </a:solidFill>
-                <a:latin typeface="Arial Black"/>
-                <a:ea typeface="Arial Black"/>
-                <a:cs typeface="Arial Black"/>
               </a:defRPr>
             </a:lvl2pPr>
             <a:lvl3pPr>
@@ -12580,9 +12574,6 @@
                 <a:solidFill>
                   <a:schemeClr val="bg1"/>
                 </a:solidFill>
-                <a:latin typeface="Arial Black"/>
-                <a:ea typeface="Arial Black"/>
-                <a:cs typeface="Arial Black"/>
               </a:defRPr>
             </a:lvl3pPr>
             <a:lvl4pPr>
@@ -12590,9 +12581,6 @@
                 <a:solidFill>
                   <a:schemeClr val="bg1"/>
                 </a:solidFill>
-                <a:latin typeface="Arial Black"/>
-                <a:ea typeface="Arial Black"/>
-                <a:cs typeface="Arial Black"/>
               </a:defRPr>
             </a:lvl4pPr>
             <a:lvl5pPr>
@@ -12600,9 +12588,6 @@
                 <a:solidFill>
                   <a:schemeClr val="bg1"/>
                 </a:solidFill>
-                <a:latin typeface="Arial Black"/>
-                <a:ea typeface="Arial Black"/>
-                <a:cs typeface="Arial Black"/>
               </a:defRPr>
             </a:lvl5pPr>
             <a:lvl6pPr>
@@ -12610,9 +12595,6 @@
                 <a:solidFill>
                   <a:schemeClr val="bg1"/>
                 </a:solidFill>
-                <a:latin typeface="Arial Black"/>
-                <a:ea typeface="Arial Black"/>
-                <a:cs typeface="Arial Black"/>
               </a:defRPr>
             </a:lvl6pPr>
             <a:lvl7pPr>
@@ -12620,9 +12602,6 @@
                 <a:solidFill>
                   <a:schemeClr val="bg1"/>
                 </a:solidFill>
-                <a:latin typeface="Arial Black"/>
-                <a:ea typeface="Arial Black"/>
-                <a:cs typeface="Arial Black"/>
               </a:defRPr>
             </a:lvl7pPr>
             <a:lvl8pPr>
@@ -12630,9 +12609,6 @@
                 <a:solidFill>
                   <a:schemeClr val="bg1"/>
                 </a:solidFill>
-                <a:latin typeface="Arial Black"/>
-                <a:ea typeface="Arial Black"/>
-                <a:cs typeface="Arial Black"/>
               </a:defRPr>
             </a:lvl8pPr>
             <a:lvl9pPr>
@@ -12640,9 +12616,6 @@
                 <a:solidFill>
                   <a:schemeClr val="bg1"/>
                 </a:solidFill>
-                <a:latin typeface="Arial Black"/>
-                <a:ea typeface="Arial Black"/>
-                <a:cs typeface="Arial Black"/>
               </a:defRPr>
             </a:lvl9pPr>
           </a:lstStyle>
@@ -13346,13 +13319,13 @@
     </a:clrScheme>
     <a:fontScheme name="Office Theme">
       <a:majorFont>
-        <a:latin typeface="Arial"/>
-        <a:ea typeface="SimSun"/>
+        <a:latin typeface="Arial Black"/>
+        <a:ea typeface="SimHei"/>
         <a:cs typeface="Arial"/>
       </a:majorFont>
       <a:minorFont>
         <a:latin typeface="Arial"/>
-        <a:ea typeface="SimSun"/>
+        <a:ea typeface="Microsoft YaHei"/>
         <a:cs typeface="Arial"/>
       </a:minorFont>
     </a:fontScheme>
@@ -13583,13 +13556,13 @@
     </a:clrScheme>
     <a:fontScheme name="Arial">
       <a:majorFont>
-        <a:latin typeface="Arial"/>
-        <a:ea typeface="Arial"/>
+        <a:latin typeface="Arial Black"/>
+        <a:ea typeface="SimHei"/>
         <a:cs typeface="Arial"/>
       </a:majorFont>
       <a:minorFont>
         <a:latin typeface="Arial"/>
-        <a:ea typeface="Arial"/>
+        <a:ea typeface="Microsoft YaHei"/>
         <a:cs typeface="Arial"/>
       </a:minorFont>
     </a:fontScheme>

--- a/slide/themes/src/25_nexus.pptx
+++ b/slide/themes/src/25_nexus.pptx
@@ -536,10 +536,7 @@
             <a:pPr>
               <a:defRPr/>
             </a:pPr>
-            <a:endParaRPr lang="en-US">
-              <a:latin typeface="Arial"/>
-              <a:cs typeface="Arial"/>
-            </a:endParaRPr>
+            <a:endParaRPr lang="en-US"/>
           </a:p>
         </p:txBody>
       </p:sp>
